--- a/report_en.pptx
+++ b/report_en.pptx
@@ -2278,7 +2278,7 @@
               <a:buNone/>
             </a:pPr>
             <a:r>
-              <a:rPr lang="en-US" sz="1500" i="1" dirty="0">
+              <a:rPr lang="en-US" sz="1800" i="1" dirty="0">
                 <a:solidFill>
                   <a:srgbClr val="9AA7B5"/>
                 </a:solidFill>
@@ -2288,7 +2288,7 @@
               </a:rPr>
               <a:t>A live demonstration in an isolated Docker sandbox</a:t>
             </a:r>
-            <a:endParaRPr lang="en-US" sz="1500" dirty="0"/>
+            <a:endParaRPr lang="en-US" sz="1800" dirty="0"/>
           </a:p>
         </p:txBody>
       </p:sp>
@@ -2507,7 +2507,7 @@
               <a:buNone/>
             </a:pPr>
             <a:r>
-              <a:rPr lang="en-US" sz="1500" dirty="0">
+              <a:rPr lang="en-US" sz="1800" dirty="0">
                 <a:solidFill>
                   <a:srgbClr val="F5B82E"/>
                 </a:solidFill>
@@ -2517,7 +2517,7 @@
               </a:rPr>
               <a:t>Eliminated at the language level: refused at compile time, or a safe panic at runtime</a:t>
             </a:r>
-            <a:endParaRPr lang="en-US" sz="1500" dirty="0"/>
+            <a:endParaRPr lang="en-US" sz="1800" dirty="0"/>
           </a:p>
         </p:txBody>
       </p:sp>
@@ -2573,7 +2573,7 @@
               <a:buNone/>
             </a:pPr>
             <a:r>
-              <a:rPr lang="en-US" sz="1600" b="1" dirty="0">
+              <a:rPr lang="en-US" sz="1800" b="1" dirty="0">
                 <a:solidFill>
                   <a:srgbClr val="FF5C57"/>
                 </a:solidFill>
@@ -2583,7 +2583,7 @@
               </a:rPr>
               <a:t>C — strcpy()</a:t>
             </a:r>
-            <a:endParaRPr lang="en-US" sz="1600" dirty="0"/>
+            <a:endParaRPr lang="en-US" sz="1800" dirty="0"/>
           </a:p>
         </p:txBody>
       </p:sp>
@@ -2701,7 +2701,7 @@
               <a:buNone/>
             </a:pPr>
             <a:r>
-              <a:rPr lang="en-US" sz="1400" b="1" dirty="0">
+              <a:rPr lang="en-US" sz="1800" b="1" dirty="0">
                 <a:solidFill>
                   <a:srgbClr val="FF5C57"/>
                 </a:solidFill>
@@ -2715,7 +2715,7 @@
               <a:buNone/>
             </a:pPr>
             <a:r>
-              <a:rPr lang="en-US" sz="1400" dirty="0">
+              <a:rPr lang="en-US" sz="1800" dirty="0">
                 <a:solidFill>
                   <a:srgbClr val="F5F7FA"/>
                 </a:solidFill>
@@ -2725,7 +2725,7 @@
               </a:rPr>
               <a:t>stack smashed</a:t>
             </a:r>
-            <a:endParaRPr lang="en-US" sz="1400" dirty="0"/>
+            <a:endParaRPr lang="en-US" sz="1800" dirty="0"/>
           </a:p>
         </p:txBody>
       </p:sp>
@@ -2754,7 +2754,7 @@
               <a:buNone/>
             </a:pPr>
             <a:r>
-              <a:rPr lang="en-US" sz="1400" b="1" dirty="0">
+              <a:rPr lang="en-US" sz="1800" b="1" dirty="0">
                 <a:solidFill>
                   <a:srgbClr val="FF5C57"/>
                 </a:solidFill>
@@ -2768,7 +2768,7 @@
               <a:buNone/>
             </a:pPr>
             <a:r>
-              <a:rPr lang="en-US" sz="1400" dirty="0">
+              <a:rPr lang="en-US" sz="1800" dirty="0">
                 <a:solidFill>
                   <a:srgbClr val="F5F7FA"/>
                 </a:solidFill>
@@ -2778,7 +2778,7 @@
               </a:rPr>
               <a:t>exit 139 · undefined behavior</a:t>
             </a:r>
-            <a:endParaRPr lang="en-US" sz="1400" dirty="0"/>
+            <a:endParaRPr lang="en-US" sz="1800" dirty="0"/>
           </a:p>
         </p:txBody>
       </p:sp>
@@ -2807,7 +2807,7 @@
               <a:buNone/>
             </a:pPr>
             <a:r>
-              <a:rPr lang="en-US" sz="1400" b="1" dirty="0">
+              <a:rPr lang="en-US" sz="1800" b="1" dirty="0">
                 <a:solidFill>
                   <a:srgbClr val="FF5C57"/>
                 </a:solidFill>
@@ -2821,7 +2821,7 @@
               <a:buNone/>
             </a:pPr>
             <a:r>
-              <a:rPr lang="en-US" sz="1400" b="1" dirty="0">
+              <a:rPr lang="en-US" sz="1800" b="1" dirty="0">
                 <a:solidFill>
                   <a:srgbClr val="FF5C57"/>
                 </a:solidFill>
@@ -2831,7 +2831,7 @@
               </a:rPr>
               <a:t>exploitable (RCE risk)</a:t>
             </a:r>
-            <a:endParaRPr lang="en-US" sz="1400" dirty="0"/>
+            <a:endParaRPr lang="en-US" sz="1800" dirty="0"/>
           </a:p>
         </p:txBody>
       </p:sp>
@@ -2887,7 +2887,7 @@
               <a:buNone/>
             </a:pPr>
             <a:r>
-              <a:rPr lang="en-US" sz="1600" b="1" dirty="0">
+              <a:rPr lang="en-US" sz="1800" b="1" dirty="0">
                 <a:solidFill>
                   <a:srgbClr val="4FD98A"/>
                 </a:solidFill>
@@ -2897,7 +2897,7 @@
               </a:rPr>
               <a:t>Rust — memory-safe</a:t>
             </a:r>
-            <a:endParaRPr lang="en-US" sz="1600" dirty="0"/>
+            <a:endParaRPr lang="en-US" sz="1800" dirty="0"/>
           </a:p>
         </p:txBody>
       </p:sp>
@@ -3031,7 +3031,7 @@
               <a:buNone/>
             </a:pPr>
             <a:r>
-              <a:rPr lang="en-US" sz="1200" b="1" dirty="0">
+              <a:rPr lang="en-US" sz="1800" b="1" dirty="0">
                 <a:solidFill>
                   <a:srgbClr val="F5B82E"/>
                 </a:solidFill>
@@ -3041,7 +3041,7 @@
               </a:rPr>
               <a:t>rustc error: index out of bounds -&gt; NO binary produced</a:t>
             </a:r>
-            <a:endParaRPr lang="en-US" sz="1200" dirty="0"/>
+            <a:endParaRPr lang="en-US" sz="1800" dirty="0"/>
           </a:p>
         </p:txBody>
       </p:sp>
@@ -3175,7 +3175,7 @@
               <a:buNone/>
             </a:pPr>
             <a:r>
-              <a:rPr lang="en-US" sz="1200" b="1" dirty="0">
+              <a:rPr lang="en-US" sz="1800" b="1" dirty="0">
                 <a:solidFill>
                   <a:srgbClr val="4FD98A"/>
                 </a:solidFill>
@@ -3185,7 +3185,7 @@
               </a:rPr>
               <a:t>safe panic · exit 101 · no memory corruption</a:t>
             </a:r>
-            <a:endParaRPr lang="en-US" sz="1200" dirty="0"/>
+            <a:endParaRPr lang="en-US" sz="1800" dirty="0"/>
           </a:p>
         </p:txBody>
       </p:sp>
@@ -3214,7 +3214,7 @@
               <a:buNone/>
             </a:pPr>
             <a:r>
-              <a:rPr lang="en-US" sz="1300" i="1" dirty="0">
+              <a:rPr lang="en-US" sz="1800" i="1" dirty="0">
                 <a:solidFill>
                   <a:srgbClr val="9AA7B5"/>
                 </a:solidFill>
@@ -3224,7 +3224,7 @@
               </a:rPr>
               <a:t>Memory-safe languages turn the whole bug class from exploitable into 'won't compile / safe abort' — Android, Windows and the Linux kernel are adopting Rust.</a:t>
             </a:r>
-            <a:endParaRPr lang="en-US" sz="1300" dirty="0"/>
+            <a:endParaRPr lang="en-US" sz="1800" dirty="0"/>
           </a:p>
         </p:txBody>
       </p:sp>
@@ -3441,7 +3441,7 @@
               <a:buNone/>
             </a:pPr>
             <a:r>
-              <a:rPr lang="en-US" sz="1500" dirty="0">
+              <a:rPr lang="en-US" sz="1800" dirty="0">
                 <a:solidFill>
                   <a:srgbClr val="F5B82E"/>
                 </a:solidFill>
@@ -3451,7 +3451,7 @@
               </a:rPr>
               <a:t>The Flush+Reload core of Spectre/Meltdown — steal data from timing alone, no corruption, no crash</a:t>
             </a:r>
-            <a:endParaRPr lang="en-US" sz="1500" dirty="0"/>
+            <a:endParaRPr lang="en-US" sz="1800" dirty="0"/>
           </a:p>
         </p:txBody>
       </p:sp>
@@ -3777,7 +3777,7 @@
               <a:buNone/>
             </a:pPr>
             <a:r>
-              <a:rPr lang="en-US" sz="1600" b="1" dirty="0">
+              <a:rPr lang="en-US" sz="1800" b="1" dirty="0">
                 <a:solidFill>
                   <a:srgbClr val="5AA9E6"/>
                 </a:solidFill>
@@ -3787,7 +3787,7 @@
               </a:rPr>
               <a:t>Flush + Reload</a:t>
             </a:r>
-            <a:endParaRPr lang="en-US" sz="1600" dirty="0"/>
+            <a:endParaRPr lang="en-US" sz="1800" dirty="0"/>
           </a:p>
         </p:txBody>
       </p:sp>
@@ -3836,7 +3836,7 @@
               <a:buNone/>
             </a:pPr>
             <a:r>
-              <a:rPr lang="en-US" sz="1600" b="1" dirty="0">
+              <a:rPr lang="en-US" sz="1800" b="1" dirty="0">
                 <a:solidFill>
                   <a:srgbClr val="12161C"/>
                 </a:solidFill>
@@ -3846,7 +3846,7 @@
               </a:rPr>
               <a:t>1</a:t>
             </a:r>
-            <a:endParaRPr lang="en-US" sz="1600" dirty="0"/>
+            <a:endParaRPr lang="en-US" sz="1800" dirty="0"/>
           </a:p>
         </p:txBody>
       </p:sp>
@@ -3875,7 +3875,7 @@
               <a:buNone/>
             </a:pPr>
             <a:r>
-              <a:rPr lang="en-US" sz="1400" dirty="0">
+              <a:rPr lang="en-US" sz="1800" dirty="0">
                 <a:solidFill>
                   <a:srgbClr val="F5F7FA"/>
                 </a:solidFill>
@@ -3885,7 +3885,7 @@
               </a:rPr>
               <a:t>Flush — evict the cache</a:t>
             </a:r>
-            <a:endParaRPr lang="en-US" sz="1400" dirty="0"/>
+            <a:endParaRPr lang="en-US" sz="1800" dirty="0"/>
           </a:p>
         </p:txBody>
       </p:sp>
@@ -3934,7 +3934,7 @@
               <a:buNone/>
             </a:pPr>
             <a:r>
-              <a:rPr lang="en-US" sz="1600" b="1" dirty="0">
+              <a:rPr lang="en-US" sz="1800" b="1" dirty="0">
                 <a:solidFill>
                   <a:srgbClr val="12161C"/>
                 </a:solidFill>
@@ -3944,7 +3944,7 @@
               </a:rPr>
               <a:t>2</a:t>
             </a:r>
-            <a:endParaRPr lang="en-US" sz="1600" dirty="0"/>
+            <a:endParaRPr lang="en-US" sz="1800" dirty="0"/>
           </a:p>
         </p:txBody>
       </p:sp>
@@ -3973,7 +3973,7 @@
               <a:buNone/>
             </a:pPr>
             <a:r>
-              <a:rPr lang="en-US" sz="1400" dirty="0">
+              <a:rPr lang="en-US" sz="1800" dirty="0">
                 <a:solidFill>
                   <a:srgbClr val="F5F7FA"/>
                 </a:solidFill>
@@ -3983,7 +3983,7 @@
               </a:rPr>
               <a:t>Victim — accesses secret[i]; only that slot is cached</a:t>
             </a:r>
-            <a:endParaRPr lang="en-US" sz="1400" dirty="0"/>
+            <a:endParaRPr lang="en-US" sz="1800" dirty="0"/>
           </a:p>
         </p:txBody>
       </p:sp>
@@ -4032,7 +4032,7 @@
               <a:buNone/>
             </a:pPr>
             <a:r>
-              <a:rPr lang="en-US" sz="1600" b="1" dirty="0">
+              <a:rPr lang="en-US" sz="1800" b="1" dirty="0">
                 <a:solidFill>
                   <a:srgbClr val="12161C"/>
                 </a:solidFill>
@@ -4042,7 +4042,7 @@
               </a:rPr>
               <a:t>3</a:t>
             </a:r>
-            <a:endParaRPr lang="en-US" sz="1600" dirty="0"/>
+            <a:endParaRPr lang="en-US" sz="1800" dirty="0"/>
           </a:p>
         </p:txBody>
       </p:sp>
@@ -4071,7 +4071,7 @@
               <a:buNone/>
             </a:pPr>
             <a:r>
-              <a:rPr lang="en-US" sz="1400" dirty="0">
+              <a:rPr lang="en-US" sz="1800" dirty="0">
                 <a:solidFill>
                   <a:srgbClr val="F5F7FA"/>
                 </a:solidFill>
@@ -4081,7 +4081,7 @@
               </a:rPr>
               <a:t>Reload — time each slot; the fastest (hit) = secret</a:t>
             </a:r>
-            <a:endParaRPr lang="en-US" sz="1400" dirty="0"/>
+            <a:endParaRPr lang="en-US" sz="1800" dirty="0"/>
           </a:p>
         </p:txBody>
       </p:sp>
@@ -4193,7 +4193,7 @@
               <a:buNone/>
             </a:pPr>
             <a:r>
-              <a:rPr lang="en-US" sz="1300" i="1" dirty="0">
+              <a:rPr lang="en-US" sz="1800" i="1" dirty="0">
                 <a:solidFill>
                   <a:srgbClr val="9AA7B5"/>
                 </a:solidFill>
@@ -4203,7 +4203,7 @@
               </a:rPr>
               <a:t>Canary / ASLR / DEP·NX do not stop this — the CPU microarchitecture itself is an attack surface; no memory corruption needed to steal data.</a:t>
             </a:r>
-            <a:endParaRPr lang="en-US" sz="1300" dirty="0"/>
+            <a:endParaRPr lang="en-US" sz="1800" dirty="0"/>
           </a:p>
         </p:txBody>
       </p:sp>
@@ -4420,7 +4420,7 @@
               <a:buNone/>
             </a:pPr>
             <a:r>
-              <a:rPr lang="en-US" sz="1500" dirty="0">
+              <a:rPr lang="en-US" sz="1800" dirty="0">
                 <a:solidFill>
                   <a:srgbClr val="F5B82E"/>
                 </a:solidFill>
@@ -4430,7 +4430,7 @@
               </a:rPr>
               <a:t>From attack to defense</a:t>
             </a:r>
-            <a:endParaRPr lang="en-US" sz="1500" dirty="0"/>
+            <a:endParaRPr lang="en-US" sz="1800" dirty="0"/>
           </a:p>
         </p:txBody>
       </p:sp>
@@ -5703,7 +5703,7 @@
               <a:buNone/>
             </a:pPr>
             <a:r>
-              <a:rPr lang="en-US" sz="1300" i="1" dirty="0">
+              <a:rPr lang="en-US" sz="1800" i="1" dirty="0">
                 <a:solidFill>
                   <a:srgbClr val="9AA7B5"/>
                 </a:solidFill>
@@ -5713,7 +5713,7 @@
               </a:rPr>
               <a:t>One storyline: create the bug -&gt; patch it -&gt; eliminate it in the language -&gt; microarchitectural side-channel — both offense and defense.</a:t>
             </a:r>
-            <a:endParaRPr lang="en-US" sz="1300" dirty="0"/>
+            <a:endParaRPr lang="en-US" sz="1800" dirty="0"/>
           </a:p>
         </p:txBody>
       </p:sp>
@@ -5930,7 +5930,7 @@
               <a:buNone/>
             </a:pPr>
             <a:r>
-              <a:rPr lang="en-US" sz="1500" dirty="0">
+              <a:rPr lang="en-US" sz="1800" dirty="0">
                 <a:solidFill>
                   <a:srgbClr val="F5B82E"/>
                 </a:solidFill>
@@ -5940,7 +5940,7 @@
               </a:rPr>
               <a:t>What the exit codes tell us</a:t>
             </a:r>
-            <a:endParaRPr lang="en-US" sz="1500" dirty="0"/>
+            <a:endParaRPr lang="en-US" sz="1800" dirty="0"/>
           </a:p>
         </p:txBody>
       </p:sp>
@@ -6035,7 +6035,7 @@
               <a:buNone/>
             </a:pPr>
             <a:r>
-              <a:rPr lang="en-US" sz="1700" dirty="0">
+              <a:rPr lang="en-US" sz="1800" dirty="0">
                 <a:solidFill>
                   <a:srgbClr val="F5F7FA"/>
                 </a:solidFill>
@@ -6045,7 +6045,7 @@
               </a:rPr>
               <a:t>SIGSEGV</a:t>
             </a:r>
-            <a:endParaRPr lang="en-US" sz="1700" dirty="0"/>
+            <a:endParaRPr lang="en-US" sz="1800" dirty="0"/>
           </a:p>
         </p:txBody>
       </p:sp>
@@ -6074,7 +6074,7 @@
               <a:buNone/>
             </a:pPr>
             <a:r>
-              <a:rPr lang="en-US" sz="1500" dirty="0">
+              <a:rPr lang="en-US" sz="1800" dirty="0">
                 <a:solidFill>
                   <a:srgbClr val="9AA7B5"/>
                 </a:solidFill>
@@ -6084,7 +6084,7 @@
               </a:rPr>
               <a:t>No canary · return address silently overwritten -&gt; uncontrolled memory fault</a:t>
             </a:r>
-            <a:endParaRPr lang="en-US" sz="1500" dirty="0"/>
+            <a:endParaRPr lang="en-US" sz="1800" dirty="0"/>
           </a:p>
         </p:txBody>
       </p:sp>
@@ -6179,7 +6179,7 @@
               <a:buNone/>
             </a:pPr>
             <a:r>
-              <a:rPr lang="en-US" sz="1700" dirty="0">
+              <a:rPr lang="en-US" sz="1800" dirty="0">
                 <a:solidFill>
                   <a:srgbClr val="F5F7FA"/>
                 </a:solidFill>
@@ -6189,7 +6189,7 @@
               </a:rPr>
               <a:t>SIGABRT</a:t>
             </a:r>
-            <a:endParaRPr lang="en-US" sz="1700" dirty="0"/>
+            <a:endParaRPr lang="en-US" sz="1800" dirty="0"/>
           </a:p>
         </p:txBody>
       </p:sp>
@@ -6218,7 +6218,7 @@
               <a:buNone/>
             </a:pPr>
             <a:r>
-              <a:rPr lang="en-US" sz="1500" dirty="0">
+              <a:rPr lang="en-US" sz="1800" dirty="0">
                 <a:solidFill>
                   <a:srgbClr val="9AA7B5"/>
                 </a:solidFill>
@@ -6228,7 +6228,7 @@
               </a:rPr>
               <a:t>Canary on · tampering caught before return -&gt; deliberate, clean abort</a:t>
             </a:r>
-            <a:endParaRPr lang="en-US" sz="1500" dirty="0"/>
+            <a:endParaRPr lang="en-US" sz="1800" dirty="0"/>
           </a:p>
         </p:txBody>
       </p:sp>
@@ -6261,7 +6261,7 @@
               <a:buChar char="•"/>
             </a:pPr>
             <a:r>
-              <a:rPr lang="en-US" sz="1500" dirty="0">
+              <a:rPr lang="en-US" sz="1800" dirty="0">
                 <a:solidFill>
                   <a:srgbClr val="F5F7FA"/>
                 </a:solidFill>
@@ -6271,7 +6271,7 @@
               </a:rPr>
               <a:t>Both builds crash — the difference is a controlled abort vs. an uncontrolled fault</a:t>
             </a:r>
-            <a:endParaRPr lang="en-US" sz="1500" dirty="0"/>
+            <a:endParaRPr lang="en-US" sz="1800" dirty="0"/>
           </a:p>
           <a:p>
             <a:pPr algn="l" marL="342900" indent="-342900">
@@ -6282,7 +6282,7 @@
               <a:buChar char="•"/>
             </a:pPr>
             <a:r>
-              <a:rPr lang="en-US" sz="1500" dirty="0">
+              <a:rPr lang="en-US" sz="1800" dirty="0">
                 <a:solidFill>
                   <a:srgbClr val="F5F7FA"/>
                 </a:solidFill>
@@ -6292,7 +6292,7 @@
               </a:rPr>
               <a:t>Protection does not prevent the crash; it prevents the tampered return address from being used</a:t>
             </a:r>
-            <a:endParaRPr lang="en-US" sz="1500" dirty="0"/>
+            <a:endParaRPr lang="en-US" sz="1800" dirty="0"/>
           </a:p>
           <a:p>
             <a:pPr algn="l" marL="342900" indent="-342900">
@@ -6303,7 +6303,7 @@
               <a:buChar char="•"/>
             </a:pPr>
             <a:r>
-              <a:rPr lang="en-US" sz="1500" dirty="0">
+              <a:rPr lang="en-US" sz="1800" dirty="0">
                 <a:solidFill>
                   <a:srgbClr val="F5F7FA"/>
                 </a:solidFill>
@@ -6313,7 +6313,7 @@
               </a:rPr>
               <a:t>Defense in depth downgrades RCE to DoS; safe coding (strncpy / bounds checks) is the real fix</a:t>
             </a:r>
-            <a:endParaRPr lang="en-US" sz="1500" dirty="0"/>
+            <a:endParaRPr lang="en-US" sz="1800" dirty="0"/>
           </a:p>
         </p:txBody>
       </p:sp>
@@ -6544,7 +6544,7 @@
               <a:buNone/>
             </a:pPr>
             <a:r>
-              <a:rPr lang="en-US" sz="1500" dirty="0">
+              <a:rPr lang="en-US" sz="1800" dirty="0">
                 <a:solidFill>
                   <a:srgbClr val="5AA9E6"/>
                 </a:solidFill>
@@ -6554,7 +6554,7 @@
               </a:rPr>
               <a:t>A new frontier: beyond memory and hardware, today's attack surface is AI / LLM</a:t>
             </a:r>
-            <a:endParaRPr lang="en-US" sz="1500" dirty="0"/>
+            <a:endParaRPr lang="en-US" sz="1800" dirty="0"/>
           </a:p>
         </p:txBody>
       </p:sp>
@@ -6669,7 +6669,7 @@
               <a:buNone/>
             </a:pPr>
             <a:r>
-              <a:rPr lang="en-US" sz="1500" b="1" dirty="0">
+              <a:rPr lang="en-US" sz="1800" b="1" dirty="0">
                 <a:solidFill>
                   <a:srgbClr val="FF5C57"/>
                 </a:solidFill>
@@ -6679,7 +6679,7 @@
               </a:rPr>
               <a:t>Buffer overflow</a:t>
             </a:r>
-            <a:endParaRPr lang="en-US" sz="1500" dirty="0"/>
+            <a:endParaRPr lang="en-US" sz="1800" dirty="0"/>
           </a:p>
         </p:txBody>
       </p:sp>
@@ -6708,7 +6708,7 @@
               <a:buNone/>
             </a:pPr>
             <a:r>
-              <a:rPr lang="en-US" sz="1300" dirty="0">
+              <a:rPr lang="en-US" sz="1800" dirty="0">
                 <a:solidFill>
                   <a:srgbClr val="F5F7FA"/>
                 </a:solidFill>
@@ -6718,7 +6718,7 @@
               </a:rPr>
               <a:t>data overwrites the return address -&gt; control</a:t>
             </a:r>
-            <a:endParaRPr lang="en-US" sz="1300" dirty="0"/>
+            <a:endParaRPr lang="en-US" sz="1800" dirty="0"/>
           </a:p>
         </p:txBody>
       </p:sp>
@@ -6767,7 +6767,7 @@
               <a:buNone/>
             </a:pPr>
             <a:r>
-              <a:rPr lang="en-US" sz="1500" b="1" dirty="0">
+              <a:rPr lang="en-US" sz="1800" b="1" dirty="0">
                 <a:solidFill>
                   <a:srgbClr val="5AA9E6"/>
                 </a:solidFill>
@@ -6777,7 +6777,7 @@
               </a:rPr>
               <a:t>Prompt injection</a:t>
             </a:r>
-            <a:endParaRPr lang="en-US" sz="1500" dirty="0"/>
+            <a:endParaRPr lang="en-US" sz="1800" dirty="0"/>
           </a:p>
         </p:txBody>
       </p:sp>
@@ -6806,7 +6806,7 @@
               <a:buNone/>
             </a:pPr>
             <a:r>
-              <a:rPr lang="en-US" sz="1300" dirty="0">
+              <a:rPr lang="en-US" sz="1800" dirty="0">
                 <a:solidFill>
                   <a:srgbClr val="F5F7FA"/>
                 </a:solidFill>
@@ -6816,7 +6816,7 @@
               </a:rPr>
               <a:t>data becomes instructions -&gt; control</a:t>
             </a:r>
-            <a:endParaRPr lang="en-US" sz="1300" dirty="0"/>
+            <a:endParaRPr lang="en-US" sz="1800" dirty="0"/>
           </a:p>
         </p:txBody>
       </p:sp>
@@ -6872,7 +6872,7 @@
               <a:buNone/>
             </a:pPr>
             <a:r>
-              <a:rPr lang="en-US" sz="1400" b="1" dirty="0">
+              <a:rPr lang="en-US" sz="1800" b="1" dirty="0">
                 <a:solidFill>
                   <a:srgbClr val="F5B82E"/>
                 </a:solidFill>
@@ -6882,7 +6882,7 @@
               </a:rPr>
               <a:t>Same root cause: data is not separated from control.</a:t>
             </a:r>
-            <a:endParaRPr lang="en-US" sz="1400" dirty="0"/>
+            <a:endParaRPr lang="en-US" sz="1800" dirty="0"/>
           </a:p>
         </p:txBody>
       </p:sp>
@@ -6977,7 +6977,7 @@
               <a:buNone/>
             </a:pPr>
             <a:r>
-              <a:rPr lang="en-US" sz="1400" b="1" dirty="0">
+              <a:rPr lang="en-US" sz="1800" b="1" dirty="0">
                 <a:solidFill>
                   <a:srgbClr val="F5F7FA"/>
                 </a:solidFill>
@@ -7001,7 +7001,7 @@
               </a:rPr>
               <a:t>- hide malicious instructions in input, override the system prompt</a:t>
             </a:r>
-            <a:endParaRPr lang="en-US" sz="1400" dirty="0"/>
+            <a:endParaRPr lang="en-US" sz="1800" dirty="0"/>
           </a:p>
         </p:txBody>
       </p:sp>
@@ -7030,7 +7030,7 @@
               <a:buNone/>
             </a:pPr>
             <a:r>
-              <a:rPr lang="en-US" sz="1400" b="1" dirty="0">
+              <a:rPr lang="en-US" sz="1800" b="1" dirty="0">
                 <a:solidFill>
                   <a:srgbClr val="F5F7FA"/>
                 </a:solidFill>
@@ -7054,7 +7054,7 @@
               </a:rPr>
               <a:t>- LLM output trusted downstream unfiltered (XSS/SSRF)</a:t>
             </a:r>
-            <a:endParaRPr lang="en-US" sz="1400" dirty="0"/>
+            <a:endParaRPr lang="en-US" sz="1800" dirty="0"/>
           </a:p>
         </p:txBody>
       </p:sp>
@@ -7083,7 +7083,7 @@
               <a:buNone/>
             </a:pPr>
             <a:r>
-              <a:rPr lang="en-US" sz="1400" b="1" dirty="0">
+              <a:rPr lang="en-US" sz="1800" b="1" dirty="0">
                 <a:solidFill>
                   <a:srgbClr val="F5F7FA"/>
                 </a:solidFill>
@@ -7107,7 +7107,7 @@
               </a:rPr>
               <a:t>- coax the model into leaking the prompt / secrets</a:t>
             </a:r>
-            <a:endParaRPr lang="en-US" sz="1400" dirty="0"/>
+            <a:endParaRPr lang="en-US" sz="1800" dirty="0"/>
           </a:p>
         </p:txBody>
       </p:sp>
@@ -7301,7 +7301,7 @@
               <a:buNone/>
             </a:pPr>
             <a:r>
-              <a:rPr lang="en-US" sz="1300" i="1" dirty="0">
+              <a:rPr lang="en-US" sz="1800" i="1" dirty="0">
                 <a:solidFill>
                   <a:srgbClr val="9AA7B5"/>
                 </a:solidFill>
@@ -7311,7 +7311,7 @@
               </a:rPr>
               <a:t>From the stack to the prompt, the lesson is the same: never let untrusted data become control.</a:t>
             </a:r>
-            <a:endParaRPr lang="en-US" sz="1300" dirty="0"/>
+            <a:endParaRPr lang="en-US" sz="1800" dirty="0"/>
           </a:p>
         </p:txBody>
       </p:sp>
@@ -7757,7 +7757,7 @@
               <a:buNone/>
             </a:pPr>
             <a:r>
-              <a:rPr lang="en-US" sz="1500" dirty="0">
+              <a:rPr lang="en-US" sz="1800" dirty="0">
                 <a:solidFill>
                   <a:srgbClr val="F5B82E"/>
                 </a:solidFill>
@@ -7767,7 +7767,7 @@
               </a:rPr>
               <a:t>Four acts in today's story</a:t>
             </a:r>
-            <a:endParaRPr lang="en-US" sz="1500" dirty="0"/>
+            <a:endParaRPr lang="en-US" sz="1800" dirty="0"/>
           </a:p>
         </p:txBody>
       </p:sp>
@@ -7894,7 +7894,7 @@
               <a:buNone/>
             </a:pPr>
             <a:r>
-              <a:rPr lang="en-US" sz="1400" dirty="0">
+              <a:rPr lang="en-US" sz="1800" dirty="0">
                 <a:solidFill>
                   <a:srgbClr val="9AA7B5"/>
                 </a:solidFill>
@@ -7904,7 +7904,7 @@
               </a:rPr>
               <a:t>Why it matters + key vocabulary (buffer / stack / canary / 139·134)</a:t>
             </a:r>
-            <a:endParaRPr lang="en-US" sz="1400" dirty="0"/>
+            <a:endParaRPr lang="en-US" sz="1800" dirty="0"/>
           </a:p>
         </p:txBody>
       </p:sp>
@@ -8031,7 +8031,7 @@
               <a:buNone/>
             </a:pPr>
             <a:r>
-              <a:rPr lang="en-US" sz="1400" dirty="0">
+              <a:rPr lang="en-US" sz="1800" dirty="0">
                 <a:solidFill>
                   <a:srgbClr val="9AA7B5"/>
                 </a:solidFill>
@@ -8041,7 +8041,7 @@
               </a:rPr>
               <a:t>Just one line of strcpy — and how it smashes the stack</a:t>
             </a:r>
-            <a:endParaRPr lang="en-US" sz="1400" dirty="0"/>
+            <a:endParaRPr lang="en-US" sz="1800" dirty="0"/>
           </a:p>
         </p:txBody>
       </p:sp>
@@ -8168,7 +8168,7 @@
               <a:buNone/>
             </a:pPr>
             <a:r>
-              <a:rPr lang="en-US" sz="1400" dirty="0">
+              <a:rPr lang="en-US" sz="1800" dirty="0">
                 <a:solidFill>
                   <a:srgbClr val="9AA7B5"/>
                 </a:solidFill>
@@ -8178,7 +8178,7 @@
               </a:rPr>
               <a:t>Trigger the crash (134 vs 139), then fix it at the source with strncpy</a:t>
             </a:r>
-            <a:endParaRPr lang="en-US" sz="1400" dirty="0"/>
+            <a:endParaRPr lang="en-US" sz="1800" dirty="0"/>
           </a:p>
         </p:txBody>
       </p:sp>
@@ -8305,7 +8305,7 @@
               <a:buNone/>
             </a:pPr>
             <a:r>
-              <a:rPr lang="en-US" sz="1400" dirty="0">
+              <a:rPr lang="en-US" sz="1800" dirty="0">
                 <a:solidFill>
                   <a:srgbClr val="9AA7B5"/>
                 </a:solidFill>
@@ -8315,7 +8315,7 @@
               </a:rPr>
               <a:t>Memory-safe Rust, cache-timing side-channel, Canary/ASLR/DEP·NX</a:t>
             </a:r>
-            <a:endParaRPr lang="en-US" sz="1400" dirty="0"/>
+            <a:endParaRPr lang="en-US" sz="1800" dirty="0"/>
           </a:p>
         </p:txBody>
       </p:sp>
@@ -8532,7 +8532,7 @@
               <a:buNone/>
             </a:pPr>
             <a:r>
-              <a:rPr lang="en-US" sz="1500" dirty="0">
+              <a:rPr lang="en-US" sz="1800" dirty="0">
                 <a:solidFill>
                   <a:srgbClr val="F5B82E"/>
                 </a:solidFill>
@@ -8542,7 +8542,7 @@
               </a:rPr>
               <a:t>A decades-old bug class that never went away</a:t>
             </a:r>
-            <a:endParaRPr lang="en-US" sz="1500" dirty="0"/>
+            <a:endParaRPr lang="en-US" sz="1800" dirty="0"/>
           </a:p>
         </p:txBody>
       </p:sp>
@@ -8637,7 +8637,7 @@
               <a:buNone/>
             </a:pPr>
             <a:r>
-              <a:rPr lang="en-US" sz="1500" dirty="0">
+              <a:rPr lang="en-US" sz="1800" dirty="0">
                 <a:solidFill>
                   <a:srgbClr val="F5F7FA"/>
                 </a:solidFill>
@@ -8647,7 +8647,7 @@
               </a:rPr>
               <a:t>of serious CVEs in C / C++ software are memory-safety bugs</a:t>
             </a:r>
-            <a:endParaRPr lang="en-US" sz="1500" dirty="0"/>
+            <a:endParaRPr lang="en-US" sz="1800" dirty="0"/>
           </a:p>
         </p:txBody>
       </p:sp>
@@ -8781,7 +8781,7 @@
               <a:buNone/>
             </a:pPr>
             <a:r>
-              <a:rPr lang="en-US" sz="1600" b="1" dirty="0">
+              <a:rPr lang="en-US" sz="1800" b="1" dirty="0">
                 <a:solidFill>
                   <a:srgbClr val="F5F7FA"/>
                 </a:solidFill>
@@ -8791,7 +8791,7 @@
               </a:rPr>
               <a:t>Morris Worm</a:t>
             </a:r>
-            <a:endParaRPr lang="en-US" sz="1600" dirty="0"/>
+            <a:endParaRPr lang="en-US" sz="1800" dirty="0"/>
           </a:p>
         </p:txBody>
       </p:sp>
@@ -8925,7 +8925,7 @@
               <a:buNone/>
             </a:pPr>
             <a:r>
-              <a:rPr lang="en-US" sz="1600" b="1" dirty="0">
+              <a:rPr lang="en-US" sz="1800" b="1" dirty="0">
                 <a:solidFill>
                   <a:srgbClr val="F5F7FA"/>
                 </a:solidFill>
@@ -8935,7 +8935,7 @@
               </a:rPr>
               <a:t>Code Red</a:t>
             </a:r>
-            <a:endParaRPr lang="en-US" sz="1600" dirty="0"/>
+            <a:endParaRPr lang="en-US" sz="1800" dirty="0"/>
           </a:p>
         </p:txBody>
       </p:sp>
@@ -9069,7 +9069,7 @@
               <a:buNone/>
             </a:pPr>
             <a:r>
-              <a:rPr lang="en-US" sz="1600" b="1" dirty="0">
+              <a:rPr lang="en-US" sz="1800" b="1" dirty="0">
                 <a:solidFill>
                   <a:srgbClr val="F5F7FA"/>
                 </a:solidFill>
@@ -9079,7 +9079,7 @@
               </a:rPr>
               <a:t>SQL Slammer</a:t>
             </a:r>
-            <a:endParaRPr lang="en-US" sz="1600" dirty="0"/>
+            <a:endParaRPr lang="en-US" sz="1800" dirty="0"/>
           </a:p>
         </p:txBody>
       </p:sp>
@@ -9213,7 +9213,7 @@
               <a:buNone/>
             </a:pPr>
             <a:r>
-              <a:rPr lang="en-US" sz="1600" b="1" dirty="0">
+              <a:rPr lang="en-US" sz="1800" b="1" dirty="0">
                 <a:solidFill>
                   <a:srgbClr val="F5F7FA"/>
                 </a:solidFill>
@@ -9223,7 +9223,7 @@
               </a:rPr>
               <a:t>Still #1</a:t>
             </a:r>
-            <a:endParaRPr lang="en-US" sz="1600" dirty="0"/>
+            <a:endParaRPr lang="en-US" sz="1800" dirty="0"/>
           </a:p>
         </p:txBody>
       </p:sp>
@@ -9479,7 +9479,7 @@
               <a:buNone/>
             </a:pPr>
             <a:r>
-              <a:rPr lang="en-US" sz="1500" dirty="0">
+              <a:rPr lang="en-US" sz="1800" dirty="0">
                 <a:solidFill>
                   <a:srgbClr val="F5B82E"/>
                 </a:solidFill>
@@ -9489,7 +9489,7 @@
               </a:rPr>
               <a:t>The vocabulary used in this report</a:t>
             </a:r>
-            <a:endParaRPr lang="en-US" sz="1500" dirty="0"/>
+            <a:endParaRPr lang="en-US" sz="1800" dirty="0"/>
           </a:p>
         </p:txBody>
       </p:sp>
@@ -10536,7 +10536,7 @@
               <a:buNone/>
             </a:pPr>
             <a:r>
-              <a:rPr lang="en-US" sz="1500" dirty="0">
+              <a:rPr lang="en-US" sz="1800" dirty="0">
                 <a:solidFill>
                   <a:srgbClr val="F5B82E"/>
                 </a:solidFill>
@@ -10546,7 +10546,7 @@
               </a:rPr>
               <a:t>Unbounded copy into a fixed-size stack buffer</a:t>
             </a:r>
-            <a:endParaRPr lang="en-US" sz="1500" dirty="0"/>
+            <a:endParaRPr lang="en-US" sz="1800" dirty="0"/>
           </a:p>
         </p:txBody>
       </p:sp>
@@ -10849,7 +10849,7 @@
               <a:buNone/>
             </a:pPr>
             <a:r>
-              <a:rPr lang="en-US" sz="1300" dirty="0">
+              <a:rPr lang="en-US" sz="1800" dirty="0">
                 <a:solidFill>
                   <a:srgbClr val="F5F7FA"/>
                 </a:solidFill>
@@ -10859,7 +10859,7 @@
               </a:rPr>
               <a:t>A fixed 64-byte buffer on the stack</a:t>
             </a:r>
-            <a:endParaRPr lang="en-US" sz="1300" dirty="0"/>
+            <a:endParaRPr lang="en-US" sz="1800" dirty="0"/>
           </a:p>
         </p:txBody>
       </p:sp>
@@ -10954,7 +10954,7 @@
               <a:buNone/>
             </a:pPr>
             <a:r>
-              <a:rPr lang="en-US" sz="1300" dirty="0">
+              <a:rPr lang="en-US" sz="1800" dirty="0">
                 <a:solidFill>
                   <a:srgbClr val="F5F7FA"/>
                 </a:solidFill>
@@ -10964,7 +10964,7 @@
               </a:rPr>
               <a:t>Copies until a NUL byte; ignores the destination size</a:t>
             </a:r>
-            <a:endParaRPr lang="en-US" sz="1300" dirty="0"/>
+            <a:endParaRPr lang="en-US" sz="1800" dirty="0"/>
           </a:p>
         </p:txBody>
       </p:sp>
@@ -11059,7 +11059,7 @@
               <a:buNone/>
             </a:pPr>
             <a:r>
-              <a:rPr lang="en-US" sz="1300" dirty="0">
+              <a:rPr lang="en-US" sz="1800" dirty="0">
                 <a:solidFill>
                   <a:srgbClr val="F5F7FA"/>
                 </a:solidFill>
@@ -11069,7 +11069,7 @@
               </a:rPr>
               <a:t>More than 64 bytes writes out of bounds, over adjacent stack data</a:t>
             </a:r>
-            <a:endParaRPr lang="en-US" sz="1300" dirty="0"/>
+            <a:endParaRPr lang="en-US" sz="1800" dirty="0"/>
           </a:p>
         </p:txBody>
       </p:sp>
@@ -11286,7 +11286,7 @@
               <a:buNone/>
             </a:pPr>
             <a:r>
-              <a:rPr lang="en-US" sz="1500" dirty="0">
+              <a:rPr lang="en-US" sz="1800" dirty="0">
                 <a:solidFill>
                   <a:srgbClr val="F5B82E"/>
                 </a:solidFill>
@@ -11296,7 +11296,7 @@
               </a:rPr>
               <a:t>Writing past the buffer overwrites the return address</a:t>
             </a:r>
-            <a:endParaRPr lang="en-US" sz="1500" dirty="0"/>
+            <a:endParaRPr lang="en-US" sz="1800" dirty="0"/>
           </a:p>
         </p:txBody>
       </p:sp>
@@ -11389,7 +11389,7 @@
               <a:buNone/>
             </a:pPr>
             <a:r>
-              <a:rPr lang="en-US" sz="1500" b="1" dirty="0">
+              <a:rPr lang="en-US" sz="1800" b="1" dirty="0">
                 <a:solidFill>
                   <a:srgbClr val="FF5C57"/>
                 </a:solidFill>
@@ -11414,7 +11414,7 @@
               </a:rPr>
               <a:t>(overwritten)</a:t>
             </a:r>
-            <a:endParaRPr lang="en-US" sz="1500" dirty="0"/>
+            <a:endParaRPr lang="en-US" sz="1800" dirty="0"/>
           </a:p>
         </p:txBody>
       </p:sp>
@@ -11468,7 +11468,7 @@
               <a:buNone/>
             </a:pPr>
             <a:r>
-              <a:rPr lang="en-US" sz="1300" dirty="0">
+              <a:rPr lang="en-US" sz="1800" dirty="0">
                 <a:solidFill>
                   <a:srgbClr val="9AA7B5"/>
                 </a:solidFill>
@@ -11478,7 +11478,7 @@
               </a:rPr>
               <a:t>saved frame pointer</a:t>
             </a:r>
-            <a:endParaRPr lang="en-US" sz="1300" dirty="0"/>
+            <a:endParaRPr lang="en-US" sz="1800" dirty="0"/>
           </a:p>
         </p:txBody>
       </p:sp>
@@ -11532,7 +11532,7 @@
               <a:buNone/>
             </a:pPr>
             <a:r>
-              <a:rPr lang="en-US" sz="1600" b="1" dirty="0">
+              <a:rPr lang="en-US" sz="1800" b="1" dirty="0">
                 <a:solidFill>
                   <a:srgbClr val="F5B82E"/>
                 </a:solidFill>
@@ -11557,7 +11557,7 @@
               </a:rPr>
               <a:t>strcpy() starts here, writes upward</a:t>
             </a:r>
-            <a:endParaRPr lang="en-US" sz="1600" dirty="0"/>
+            <a:endParaRPr lang="en-US" sz="1800" dirty="0"/>
           </a:p>
         </p:txBody>
       </p:sp>
@@ -11764,7 +11764,7 @@
               <a:buNone/>
             </a:pPr>
             <a:r>
-              <a:rPr lang="en-US" sz="1400" dirty="0">
+              <a:rPr lang="en-US" sz="1800" dirty="0">
                 <a:solidFill>
                   <a:srgbClr val="F5F7FA"/>
                 </a:solidFill>
@@ -11774,7 +11774,7 @@
               </a:rPr>
               <a:t>200 bytes of 'A' fill the 64-byte buffer and keep going</a:t>
             </a:r>
-            <a:endParaRPr lang="en-US" sz="1400" dirty="0"/>
+            <a:endParaRPr lang="en-US" sz="1800" dirty="0"/>
           </a:p>
         </p:txBody>
       </p:sp>
@@ -11862,7 +11862,7 @@
               <a:buNone/>
             </a:pPr>
             <a:r>
-              <a:rPr lang="en-US" sz="1400" dirty="0">
+              <a:rPr lang="en-US" sz="1800" dirty="0">
                 <a:solidFill>
                   <a:srgbClr val="F5F7FA"/>
                 </a:solidFill>
@@ -11872,7 +11872,7 @@
               </a:rPr>
               <a:t>Frame pointer and return address get overwritten with 0x41 ('A')</a:t>
             </a:r>
-            <a:endParaRPr lang="en-US" sz="1400" dirty="0"/>
+            <a:endParaRPr lang="en-US" sz="1800" dirty="0"/>
           </a:p>
         </p:txBody>
       </p:sp>
@@ -11960,7 +11960,7 @@
               <a:buNone/>
             </a:pPr>
             <a:r>
-              <a:rPr lang="en-US" sz="1400" dirty="0">
+              <a:rPr lang="en-US" sz="1800" dirty="0">
                 <a:solidFill>
                   <a:srgbClr val="F5F7FA"/>
                 </a:solidFill>
@@ -11970,7 +11970,7 @@
               </a:rPr>
               <a:t>On return, control flow is corrupted -&gt; crash</a:t>
             </a:r>
-            <a:endParaRPr lang="en-US" sz="1400" dirty="0"/>
+            <a:endParaRPr lang="en-US" sz="1800" dirty="0"/>
           </a:p>
         </p:txBody>
       </p:sp>
@@ -12187,7 +12187,7 @@
               <a:buNone/>
             </a:pPr>
             <a:r>
-              <a:rPr lang="en-US" sz="1500" dirty="0">
+              <a:rPr lang="en-US" sz="1800" dirty="0">
                 <a:solidFill>
                   <a:srgbClr val="F5B82E"/>
                 </a:solidFill>
@@ -12197,7 +12197,7 @@
               </a:rPr>
               <a:t>Cut to the terminal recording here</a:t>
             </a:r>
-            <a:endParaRPr lang="en-US" sz="1500" dirty="0"/>
+            <a:endParaRPr lang="en-US" sz="1800" dirty="0"/>
           </a:p>
         </p:txBody>
       </p:sp>
@@ -12292,7 +12292,7 @@
               <a:buNone/>
             </a:pPr>
             <a:r>
-              <a:rPr lang="en-US" sz="1700" b="1" dirty="0">
+              <a:rPr lang="en-US" sz="1800" b="1" dirty="0">
                 <a:solidFill>
                   <a:srgbClr val="F5F7FA"/>
                 </a:solidFill>
@@ -12302,7 +12302,7 @@
               </a:rPr>
               <a:t>Normal request</a:t>
             </a:r>
-            <a:endParaRPr lang="en-US" sz="1700" dirty="0"/>
+            <a:endParaRPr lang="en-US" sz="1800" dirty="0"/>
           </a:p>
         </p:txBody>
       </p:sp>
@@ -12605,7 +12605,7 @@
               <a:buNone/>
             </a:pPr>
             <a:r>
-              <a:rPr lang="en-US" sz="1700" b="1" dirty="0">
+              <a:rPr lang="en-US" sz="1800" b="1" dirty="0">
                 <a:solidFill>
                   <a:srgbClr val="F5F7FA"/>
                 </a:solidFill>
@@ -12615,7 +12615,7 @@
               </a:rPr>
               <a:t>Unprotected (no canary)</a:t>
             </a:r>
-            <a:endParaRPr lang="en-US" sz="1700" dirty="0"/>
+            <a:endParaRPr lang="en-US" sz="1800" dirty="0"/>
           </a:p>
         </p:txBody>
       </p:sp>
@@ -12918,7 +12918,7 @@
               <a:buNone/>
             </a:pPr>
             <a:r>
-              <a:rPr lang="en-US" sz="1700" b="1" dirty="0">
+              <a:rPr lang="en-US" sz="1800" b="1" dirty="0">
                 <a:solidFill>
                   <a:srgbClr val="F5F7FA"/>
                 </a:solidFill>
@@ -12928,7 +12928,7 @@
               </a:rPr>
               <a:t>Protected (canary on)</a:t>
             </a:r>
-            <a:endParaRPr lang="en-US" sz="1700" dirty="0"/>
+            <a:endParaRPr lang="en-US" sz="1800" dirty="0"/>
           </a:p>
         </p:txBody>
       </p:sp>
@@ -13353,7 +13353,7 @@
               <a:buNone/>
             </a:pPr>
             <a:r>
-              <a:rPr lang="en-US" sz="1500" dirty="0">
+              <a:rPr lang="en-US" sz="1800" dirty="0">
                 <a:solidFill>
                   <a:srgbClr val="F5B82E"/>
                 </a:solidFill>
@@ -13363,7 +13363,7 @@
               </a:rPr>
               <a:t>Independent protections that reinforce each other</a:t>
             </a:r>
-            <a:endParaRPr lang="en-US" sz="1500" dirty="0"/>
+            <a:endParaRPr lang="en-US" sz="1800" dirty="0"/>
           </a:p>
         </p:txBody>
       </p:sp>
@@ -13540,7 +13540,7 @@
               <a:buNone/>
             </a:pPr>
             <a:r>
-              <a:rPr lang="en-US" sz="1300" dirty="0">
+              <a:rPr lang="en-US" sz="1800" dirty="0">
                 <a:solidFill>
                   <a:srgbClr val="F5F7FA"/>
                 </a:solidFill>
@@ -13597,7 +13597,7 @@
               <a:buNone/>
             </a:pPr>
             <a:r>
-              <a:rPr lang="en-US" sz="1300" b="1" dirty="0">
+              <a:rPr lang="en-US" sz="1800" b="1" dirty="0">
                 <a:solidFill>
                   <a:srgbClr val="F5B82E"/>
                 </a:solidFill>
@@ -13784,7 +13784,7 @@
               <a:buNone/>
             </a:pPr>
             <a:r>
-              <a:rPr lang="en-US" sz="1300" dirty="0">
+              <a:rPr lang="en-US" sz="1800" dirty="0">
                 <a:solidFill>
                   <a:srgbClr val="F5F7FA"/>
                 </a:solidFill>
@@ -13841,7 +13841,7 @@
               <a:buNone/>
             </a:pPr>
             <a:r>
-              <a:rPr lang="en-US" sz="1300" b="1" dirty="0">
+              <a:rPr lang="en-US" sz="1800" b="1" dirty="0">
                 <a:solidFill>
                   <a:srgbClr val="5AA9E6"/>
                 </a:solidFill>
@@ -14028,7 +14028,7 @@
               <a:buNone/>
             </a:pPr>
             <a:r>
-              <a:rPr lang="en-US" sz="1300" dirty="0">
+              <a:rPr lang="en-US" sz="1800" dirty="0">
                 <a:solidFill>
                   <a:srgbClr val="F5F7FA"/>
                 </a:solidFill>
@@ -14085,7 +14085,7 @@
               <a:buNone/>
             </a:pPr>
             <a:r>
-              <a:rPr lang="en-US" sz="1300" b="1" dirty="0">
+              <a:rPr lang="en-US" sz="1800" b="1" dirty="0">
                 <a:solidFill>
                   <a:srgbClr val="4FD98A"/>
                 </a:solidFill>
@@ -14124,7 +14124,7 @@
               <a:buNone/>
             </a:pPr>
             <a:r>
-              <a:rPr lang="en-US" sz="1400" i="1" dirty="0">
+              <a:rPr lang="en-US" sz="1800" i="1" dirty="0">
                 <a:solidFill>
                   <a:srgbClr val="9AA7B5"/>
                 </a:solidFill>
@@ -14134,7 +14134,7 @@
               </a:rPr>
               <a:t>When not bypassed, these turn remote code execution (RCE) into a mere crash (DoS).</a:t>
             </a:r>
-            <a:endParaRPr lang="en-US" sz="1400" dirty="0"/>
+            <a:endParaRPr lang="en-US" sz="1800" dirty="0"/>
           </a:p>
         </p:txBody>
       </p:sp>
@@ -14351,7 +14351,7 @@
               <a:buNone/>
             </a:pPr>
             <a:r>
-              <a:rPr lang="en-US" sz="1500" dirty="0">
+              <a:rPr lang="en-US" sz="1800" dirty="0">
                 <a:solidFill>
                   <a:srgbClr val="F5B82E"/>
                 </a:solidFill>
@@ -14361,7 +14361,7 @@
               </a:rPr>
               <a:t>Second demo — strcpy -&gt; strncpy, same 200-byte payload</a:t>
             </a:r>
-            <a:endParaRPr lang="en-US" sz="1500" dirty="0"/>
+            <a:endParaRPr lang="en-US" sz="1800" dirty="0"/>
           </a:p>
         </p:txBody>
       </p:sp>
@@ -14417,7 +14417,7 @@
               <a:buNone/>
             </a:pPr>
             <a:r>
-              <a:rPr lang="en-US" sz="1600" b="1" dirty="0">
+              <a:rPr lang="en-US" sz="1800" b="1" dirty="0">
                 <a:solidFill>
                   <a:srgbClr val="FF5C57"/>
                 </a:solidFill>
@@ -14427,7 +14427,7 @@
               </a:rPr>
               <a:t>VULNERABLE — strcpy()</a:t>
             </a:r>
-            <a:endParaRPr lang="en-US" sz="1600" dirty="0"/>
+            <a:endParaRPr lang="en-US" sz="1800" dirty="0"/>
           </a:p>
         </p:txBody>
       </p:sp>
@@ -14545,7 +14545,7 @@
               <a:buNone/>
             </a:pPr>
             <a:r>
-              <a:rPr lang="en-US" sz="1400" b="1" dirty="0">
+              <a:rPr lang="en-US" sz="1800" b="1" dirty="0">
                 <a:solidFill>
                   <a:srgbClr val="FF5C57"/>
                 </a:solidFill>
@@ -14559,7 +14559,7 @@
               <a:buNone/>
             </a:pPr>
             <a:r>
-              <a:rPr lang="en-US" sz="1400" dirty="0">
+              <a:rPr lang="en-US" sz="1800" dirty="0">
                 <a:solidFill>
                   <a:srgbClr val="F5F7FA"/>
                 </a:solidFill>
@@ -14569,7 +14569,7 @@
               </a:rPr>
               <a:t>received 200 bytes</a:t>
             </a:r>
-            <a:endParaRPr lang="en-US" sz="1400" dirty="0"/>
+            <a:endParaRPr lang="en-US" sz="1800" dirty="0"/>
           </a:p>
         </p:txBody>
       </p:sp>
@@ -14598,7 +14598,7 @@
               <a:buNone/>
             </a:pPr>
             <a:r>
-              <a:rPr lang="en-US" sz="1400" b="1" dirty="0">
+              <a:rPr lang="en-US" sz="1800" b="1" dirty="0">
                 <a:solidFill>
                   <a:srgbClr val="FF5C57"/>
                 </a:solidFill>
@@ -14612,7 +14612,7 @@
               <a:buNone/>
             </a:pPr>
             <a:r>
-              <a:rPr lang="en-US" sz="1400" dirty="0">
+              <a:rPr lang="en-US" sz="1800" dirty="0">
                 <a:solidFill>
                   <a:srgbClr val="F5F7FA"/>
                 </a:solidFill>
@@ -14622,7 +14622,7 @@
               </a:rPr>
               <a:t>Segmentation fault</a:t>
             </a:r>
-            <a:endParaRPr lang="en-US" sz="1400" dirty="0"/>
+            <a:endParaRPr lang="en-US" sz="1800" dirty="0"/>
           </a:p>
         </p:txBody>
       </p:sp>
@@ -14651,7 +14651,7 @@
               <a:buNone/>
             </a:pPr>
             <a:r>
-              <a:rPr lang="en-US" sz="1400" b="1" dirty="0">
+              <a:rPr lang="en-US" sz="1800" b="1" dirty="0">
                 <a:solidFill>
                   <a:srgbClr val="FF5C57"/>
                 </a:solidFill>
@@ -14665,7 +14665,7 @@
               <a:buNone/>
             </a:pPr>
             <a:r>
-              <a:rPr lang="en-US" sz="1400" b="1" dirty="0">
+              <a:rPr lang="en-US" sz="1800" b="1" dirty="0">
                 <a:solidFill>
                   <a:srgbClr val="FF5C57"/>
                 </a:solidFill>
@@ -14675,7 +14675,7 @@
               </a:rPr>
               <a:t>exit 139 · server DIED</a:t>
             </a:r>
-            <a:endParaRPr lang="en-US" sz="1400" dirty="0"/>
+            <a:endParaRPr lang="en-US" sz="1800" dirty="0"/>
           </a:p>
         </p:txBody>
       </p:sp>
@@ -14731,7 +14731,7 @@
               <a:buNone/>
             </a:pPr>
             <a:r>
-              <a:rPr lang="en-US" sz="1600" b="1" dirty="0">
+              <a:rPr lang="en-US" sz="1800" b="1" dirty="0">
                 <a:solidFill>
                   <a:srgbClr val="4FD98A"/>
                 </a:solidFill>
@@ -14741,7 +14741,7 @@
               </a:rPr>
               <a:t>FIXED — strncpy()</a:t>
             </a:r>
-            <a:endParaRPr lang="en-US" sz="1600" dirty="0"/>
+            <a:endParaRPr lang="en-US" sz="1800" dirty="0"/>
           </a:p>
         </p:txBody>
       </p:sp>
@@ -14879,7 +14879,7 @@
               <a:buNone/>
             </a:pPr>
             <a:r>
-              <a:rPr lang="en-US" sz="1400" b="1" dirty="0">
+              <a:rPr lang="en-US" sz="1800" b="1" dirty="0">
                 <a:solidFill>
                   <a:srgbClr val="4FD98A"/>
                 </a:solidFill>
@@ -14893,7 +14893,7 @@
               <a:buNone/>
             </a:pPr>
             <a:r>
-              <a:rPr lang="en-US" sz="1400" dirty="0">
+              <a:rPr lang="en-US" sz="1800" dirty="0">
                 <a:solidFill>
                   <a:srgbClr val="F5F7FA"/>
                 </a:solidFill>
@@ -14903,7 +14903,7 @@
               </a:rPr>
               <a:t>kept 63 bytes, truncated</a:t>
             </a:r>
-            <a:endParaRPr lang="en-US" sz="1400" dirty="0"/>
+            <a:endParaRPr lang="en-US" sz="1800" dirty="0"/>
           </a:p>
         </p:txBody>
       </p:sp>
@@ -14932,7 +14932,7 @@
               <a:buNone/>
             </a:pPr>
             <a:r>
-              <a:rPr lang="en-US" sz="1400" b="1" dirty="0">
+              <a:rPr lang="en-US" sz="1800" b="1" dirty="0">
                 <a:solidFill>
                   <a:srgbClr val="4FD98A"/>
                 </a:solidFill>
@@ -14946,7 +14946,7 @@
               <a:buNone/>
             </a:pPr>
             <a:r>
-              <a:rPr lang="en-US" sz="1400" dirty="0">
+              <a:rPr lang="en-US" sz="1800" dirty="0">
                 <a:solidFill>
                   <a:srgbClr val="F5F7FA"/>
                 </a:solidFill>
@@ -14956,7 +14956,7 @@
               </a:rPr>
               <a:t>server replied OK (safe)</a:t>
             </a:r>
-            <a:endParaRPr lang="en-US" sz="1400" dirty="0"/>
+            <a:endParaRPr lang="en-US" sz="1800" dirty="0"/>
           </a:p>
         </p:txBody>
       </p:sp>
@@ -14985,7 +14985,7 @@
               <a:buNone/>
             </a:pPr>
             <a:r>
-              <a:rPr lang="en-US" sz="1400" b="1" dirty="0">
+              <a:rPr lang="en-US" sz="1800" b="1" dirty="0">
                 <a:solidFill>
                   <a:srgbClr val="4FD98A"/>
                 </a:solidFill>
@@ -14999,7 +14999,7 @@
               <a:buNone/>
             </a:pPr>
             <a:r>
-              <a:rPr lang="en-US" sz="1400" b="1" dirty="0">
+              <a:rPr lang="en-US" sz="1800" b="1" dirty="0">
                 <a:solidFill>
                   <a:srgbClr val="4FD98A"/>
                 </a:solidFill>
@@ -15009,7 +15009,7 @@
               </a:rPr>
               <a:t>server SURVIVED</a:t>
             </a:r>
-            <a:endParaRPr lang="en-US" sz="1400" dirty="0"/>
+            <a:endParaRPr lang="en-US" sz="1800" dirty="0"/>
           </a:p>
         </p:txBody>
       </p:sp>
@@ -15038,7 +15038,7 @@
               <a:buNone/>
             </a:pPr>
             <a:r>
-              <a:rPr lang="en-US" sz="1400" i="1" dirty="0">
+              <a:rPr lang="en-US" sz="1800" i="1" dirty="0">
                 <a:solidFill>
                   <a:srgbClr val="9AA7B5"/>
                 </a:solidFill>
@@ -15048,7 +15048,7 @@
               </a:rPr>
               <a:t>Protections make it stop at a crash; safe coding (bounds checks) prevents the overflow entirely — the real fix.</a:t>
             </a:r>
-            <a:endParaRPr lang="en-US" sz="1400" dirty="0"/>
+            <a:endParaRPr lang="en-US" sz="1800" dirty="0"/>
           </a:p>
         </p:txBody>
       </p:sp>

--- a/report_en.pptx
+++ b/report_en.pptx
@@ -7550,8 +7550,8 @@
         </p:nvSpPr>
         <p:spPr>
           <a:xfrm>
-            <a:off x="731520" y="4114800"/>
-            <a:ext cx="5669280" cy="566928"/>
+            <a:off x="731520" y="4069080"/>
+            <a:ext cx="6035040" cy="566928"/>
           </a:xfrm>
           <a:prstGeom prst="roundRect">
             <a:avLst>
@@ -7577,24 +7577,24 @@
         </p:nvSpPr>
         <p:spPr>
           <a:xfrm>
-            <a:off x="868680" y="4114800"/>
-            <a:ext cx="5486400" cy="566928"/>
-          </a:xfrm>
-          <a:prstGeom prst="rect">
-            <a:avLst/>
-          </a:prstGeom>
-          <a:noFill/>
-          <a:ln/>
-        </p:spPr>
-        <p:txBody>
-          <a:bodyPr wrap="square" lIns="0" tIns="0" rIns="0" bIns="0" rtlCol="0" anchor="ctr"/>
-          <a:lstStyle/>
-          <a:p>
-            <a:pPr algn="l" indent="0" marL="0">
-              <a:buNone/>
-            </a:pPr>
-            <a:r>
-              <a:rPr lang="en-US" sz="1400" dirty="0">
+            <a:off x="868680" y="4069080"/>
+            <a:ext cx="5852160" cy="566928"/>
+          </a:xfrm>
+          <a:prstGeom prst="rect">
+            <a:avLst/>
+          </a:prstGeom>
+          <a:noFill/>
+          <a:ln/>
+        </p:spPr>
+        <p:txBody>
+          <a:bodyPr wrap="square" lIns="0" tIns="0" rIns="0" bIns="0" rtlCol="0" anchor="ctr"/>
+          <a:lstStyle/>
+          <a:p>
+            <a:pPr algn="l" indent="0" marL="0">
+              <a:buNone/>
+            </a:pPr>
+            <a:r>
+              <a:rPr lang="en-US" sz="1500" dirty="0">
                 <a:solidFill>
                   <a:srgbClr val="4FD98A"/>
                 </a:solidFill>
@@ -7608,7 +7608,7 @@
               <a:buNone/>
             </a:pPr>
             <a:r>
-              <a:rPr lang="en-US" sz="1400" dirty="0">
+              <a:rPr lang="en-US" sz="1500" dirty="0">
                 <a:solidFill>
                   <a:srgbClr val="F5F7FA"/>
                 </a:solidFill>
@@ -7618,19 +7618,99 @@
               </a:rPr>
               <a:t>docker run --rm -it overflow-demo</a:t>
             </a:r>
-            <a:endParaRPr lang="en-US" sz="1400" dirty="0"/>
-          </a:p>
-        </p:txBody>
-      </p:sp>
-      <p:sp>
-        <p:nvSpPr>
-          <p:cNvPr id="6" name="Text 4"/>
-          <p:cNvSpPr txBox="1"/>
-          <p:nvPr/>
-        </p:nvSpPr>
-        <p:spPr>
-          <a:xfrm>
-            <a:off x="749808" y="4937760"/>
+            <a:endParaRPr lang="en-US" sz="1500" dirty="0"/>
+          </a:p>
+        </p:txBody>
+      </p:sp>
+      <p:sp>
+        <p:nvSpPr>
+          <p:cNvPr id="6" name="Shape 4"/>
+          <p:cNvSpPr/>
+          <p:nvPr/>
+        </p:nvSpPr>
+        <p:spPr>
+          <a:xfrm>
+            <a:off x="731520" y="4773168"/>
+            <a:ext cx="6035040" cy="566928"/>
+          </a:xfrm>
+          <a:prstGeom prst="roundRect">
+            <a:avLst>
+              <a:gd name="adj" fmla="val 12903"/>
+            </a:avLst>
+          </a:prstGeom>
+          <a:solidFill>
+            <a:srgbClr val="1B2430"/>
+          </a:solidFill>
+          <a:ln w="12700">
+            <a:solidFill>
+              <a:srgbClr val="4FD98A"/>
+            </a:solidFill>
+            <a:prstDash val="solid"/>
+          </a:ln>
+        </p:spPr>
+      </p:sp>
+      <p:sp>
+        <p:nvSpPr>
+          <p:cNvPr id="7" name="Text 5"/>
+          <p:cNvSpPr txBox="1"/>
+          <p:nvPr/>
+        </p:nvSpPr>
+        <p:spPr>
+          <a:xfrm>
+            <a:off x="868680" y="4773168"/>
+            <a:ext cx="5852160" cy="566928"/>
+          </a:xfrm>
+          <a:prstGeom prst="rect">
+            <a:avLst/>
+          </a:prstGeom>
+          <a:noFill/>
+          <a:ln/>
+        </p:spPr>
+        <p:txBody>
+          <a:bodyPr wrap="square" lIns="0" tIns="0" rIns="0" bIns="0" rtlCol="0" anchor="ctr"/>
+          <a:lstStyle/>
+          <a:p>
+            <a:pPr algn="l" indent="0" marL="0">
+              <a:buNone/>
+            </a:pPr>
+            <a:r>
+              <a:rPr lang="en-US" sz="1500" dirty="0">
+                <a:solidFill>
+                  <a:srgbClr val="4FD98A"/>
+                </a:solidFill>
+                <a:latin typeface="Courier New" pitchFamily="34" charset="0"/>
+                <a:ea typeface="Courier New" pitchFamily="34" charset="-122"/>
+                <a:cs typeface="Courier New" pitchFamily="34" charset="-120"/>
+              </a:rPr>
+              <a:t>code  </a:t>
+            </a:r>
+            <a:pPr algn="l" indent="0" marL="0">
+              <a:buNone/>
+            </a:pPr>
+            <a:r>
+              <a:rPr lang="en-US" sz="1500" dirty="0">
+                <a:solidFill>
+                  <a:srgbClr val="F5F7FA"/>
+                </a:solidFill>
+                <a:latin typeface="Courier New" pitchFamily="34" charset="0"/>
+                <a:ea typeface="Courier New" pitchFamily="34" charset="-122"/>
+                <a:cs typeface="Courier New" pitchFamily="34" charset="-120"/>
+              </a:rPr>
+              <a:t>github.com/happyfishskin/remote_fight</a:t>
+            </a:r>
+            <a:endParaRPr lang="en-US" sz="1500" dirty="0"/>
+          </a:p>
+        </p:txBody>
+      </p:sp>
+      <p:sp>
+        <p:nvSpPr>
+          <p:cNvPr id="8" name="Text 6"/>
+          <p:cNvSpPr txBox="1"/>
+          <p:nvPr/>
+        </p:nvSpPr>
+        <p:spPr>
+          <a:xfrm>
+            <a:off x="749808" y="5577840"/>
             <a:ext cx="10698480" cy="365760"/>
           </a:xfrm>
           <a:prstGeom prst="rect">
@@ -7647,7 +7727,7 @@
               <a:buNone/>
             </a:pPr>
             <a:r>
-              <a:rPr lang="en-US" sz="1300" i="1" dirty="0">
+              <a:rPr lang="en-US" sz="1800" i="1" dirty="0">
                 <a:solidFill>
                   <a:srgbClr val="9AA7B5"/>
                 </a:solidFill>
@@ -7657,7 +7737,7 @@
               </a:rPr>
               <a:t>Entire demo runs in an isolated Docker sandbox · no exploit code</a:t>
             </a:r>
-            <a:endParaRPr lang="en-US" sz="1300" dirty="0"/>
+            <a:endParaRPr lang="en-US" sz="1800" dirty="0"/>
           </a:p>
         </p:txBody>
       </p:sp>
